--- a/instructor/slides/pptx/sections/02-dataweave-fundamentals.pptx
+++ b/instructor/slides/pptx/sections/02-dataweave-fundamentals.pptx
@@ -3739,8 +3739,8 @@
         </p:nvSpPr>
         <p:spPr>
           <a:xfrm>
-            <a:off x="640080" y="1920240"/>
-            <a:ext cx="10972800" cy="1463040"/>
+            <a:off x="640080" y="1828800"/>
+            <a:ext cx="6675120" cy="1645920"/>
           </a:xfrm>
           <a:prstGeom prst="rect">
             <a:avLst/>
@@ -3754,7 +3754,7 @@
           <a:lstStyle/>
           <a:p>
             <a:r>
-              <a:rPr sz="4400" b="1">
+              <a:rPr sz="4000" b="1">
                 <a:solidFill>
                   <a:srgbClr val="FFFFFF"/>
                 </a:solidFill>
@@ -3773,8 +3773,8 @@
         </p:nvSpPr>
         <p:spPr>
           <a:xfrm>
-            <a:off x="640080" y="3657600"/>
-            <a:ext cx="10789920" cy="1097280"/>
+            <a:off x="640080" y="3794760"/>
+            <a:ext cx="6675120" cy="1097280"/>
           </a:xfrm>
           <a:prstGeom prst="rect">
             <a:avLst/>
@@ -3788,7 +3788,7 @@
           <a:lstStyle/>
           <a:p>
             <a:r>
-              <a:rPr sz="2000" b="0">
+              <a:rPr sz="1800" b="0">
                 <a:solidFill>
                   <a:srgbClr val="B7CBDE"/>
                 </a:solidFill>
@@ -3799,6 +3799,30 @@
           </a:p>
         </p:txBody>
       </p:sp>
+      <p:pic>
+        <p:nvPicPr>
+          <p:cNvPr id="6" name="Picture 5" descr="dw-script.jpg"/>
+          <p:cNvPicPr>
+            <a:picLocks noChangeAspect="1"/>
+          </p:cNvPicPr>
+          <p:nvPr/>
+        </p:nvPicPr>
+        <p:blipFill>
+          <a:blip r:embed="rId2"/>
+          <a:stretch>
+            <a:fillRect/>
+          </a:stretch>
+        </p:blipFill>
+        <p:spPr>
+          <a:xfrm>
+            <a:off x="7452360" y="1325880"/>
+            <a:ext cx="4160520" cy="4160520"/>
+          </a:xfrm>
+          <a:prstGeom prst="rect">
+            <a:avLst/>
+          </a:prstGeom>
+        </p:spPr>
+      </p:pic>
     </p:spTree>
   </p:cSld>
   <p:clrMapOvr>
@@ -3902,8 +3926,8 @@
         </p:nvSpPr>
         <p:spPr>
           <a:xfrm>
-            <a:off x="640080" y="685800"/>
-            <a:ext cx="10972800" cy="1463040"/>
+            <a:off x="640080" y="658368"/>
+            <a:ext cx="7863840" cy="1645920"/>
           </a:xfrm>
           <a:prstGeom prst="rect">
             <a:avLst/>
@@ -3917,7 +3941,7 @@
           <a:lstStyle/>
           <a:p>
             <a:r>
-              <a:rPr sz="3200" b="1">
+              <a:rPr sz="3000" b="1">
                 <a:solidFill>
                   <a:srgbClr val="FFFFFF"/>
                 </a:solidFill>
@@ -3936,8 +3960,8 @@
         </p:nvSpPr>
         <p:spPr>
           <a:xfrm>
-            <a:off x="777240" y="2286000"/>
-            <a:ext cx="10607040" cy="4754880"/>
+            <a:off x="777240" y="2331720"/>
+            <a:ext cx="7498079" cy="4754880"/>
           </a:xfrm>
           <a:prstGeom prst="rect">
             <a:avLst/>
@@ -3956,7 +3980,7 @@
               </a:spcAft>
             </a:pPr>
             <a:r>
-              <a:rPr sz="2400" b="0">
+              <a:rPr sz="2200" b="0">
                 <a:solidFill>
                   <a:srgbClr val="FFFFFF"/>
                 </a:solidFill>
@@ -3972,7 +3996,7 @@
               </a:spcAft>
             </a:pPr>
             <a:r>
-              <a:rPr sz="2400" b="0">
+              <a:rPr sz="2200" b="0">
                 <a:solidFill>
                   <a:srgbClr val="FFFFFF"/>
                 </a:solidFill>
@@ -3988,7 +4012,7 @@
               </a:spcAft>
             </a:pPr>
             <a:r>
-              <a:rPr sz="2400" b="0">
+              <a:rPr sz="2200" b="0">
                 <a:solidFill>
                   <a:srgbClr val="FFFFFF"/>
                 </a:solidFill>
@@ -3999,6 +4023,30 @@
           </a:p>
         </p:txBody>
       </p:sp>
+      <p:pic>
+        <p:nvPicPr>
+          <p:cNvPr id="6" name="Picture 5" descr="dw-objects.jpg"/>
+          <p:cNvPicPr>
+            <a:picLocks noChangeAspect="1"/>
+          </p:cNvPicPr>
+          <p:nvPr/>
+        </p:nvPicPr>
+        <p:blipFill>
+          <a:blip r:embed="rId2"/>
+          <a:stretch>
+            <a:fillRect/>
+          </a:stretch>
+        </p:blipFill>
+        <p:spPr>
+          <a:xfrm>
+            <a:off x="8732520" y="2057400"/>
+            <a:ext cx="2880360" cy="2880360"/>
+          </a:xfrm>
+          <a:prstGeom prst="rect">
+            <a:avLst/>
+          </a:prstGeom>
+        </p:spPr>
+      </p:pic>
     </p:spTree>
   </p:cSld>
   <p:clrMapOvr>
@@ -4102,8 +4150,8 @@
         </p:nvSpPr>
         <p:spPr>
           <a:xfrm>
-            <a:off x="640080" y="685800"/>
-            <a:ext cx="10972800" cy="1463040"/>
+            <a:off x="640080" y="658368"/>
+            <a:ext cx="7863840" cy="1645920"/>
           </a:xfrm>
           <a:prstGeom prst="rect">
             <a:avLst/>
@@ -4117,7 +4165,7 @@
           <a:lstStyle/>
           <a:p>
             <a:r>
-              <a:rPr sz="3200" b="1">
+              <a:rPr sz="3000" b="1">
                 <a:solidFill>
                   <a:srgbClr val="FFFFFF"/>
                 </a:solidFill>
@@ -4136,8 +4184,8 @@
         </p:nvSpPr>
         <p:spPr>
           <a:xfrm>
-            <a:off x="777240" y="2286000"/>
-            <a:ext cx="10607040" cy="4754880"/>
+            <a:off x="777240" y="2331720"/>
+            <a:ext cx="7498079" cy="4754880"/>
           </a:xfrm>
           <a:prstGeom prst="rect">
             <a:avLst/>
@@ -4156,7 +4204,7 @@
               </a:spcAft>
             </a:pPr>
             <a:r>
-              <a:rPr sz="2400" b="0">
+              <a:rPr sz="2200" b="0">
                 <a:solidFill>
                   <a:srgbClr val="FFFFFF"/>
                 </a:solidFill>
@@ -4172,7 +4220,7 @@
               </a:spcAft>
             </a:pPr>
             <a:r>
-              <a:rPr sz="2400" b="0">
+              <a:rPr sz="2200" b="0">
                 <a:solidFill>
                   <a:srgbClr val="FFFFFF"/>
                 </a:solidFill>
@@ -4183,6 +4231,30 @@
           </a:p>
         </p:txBody>
       </p:sp>
+      <p:pic>
+        <p:nvPicPr>
+          <p:cNvPr id="6" name="Picture 5" descr="dw-script.jpg"/>
+          <p:cNvPicPr>
+            <a:picLocks noChangeAspect="1"/>
+          </p:cNvPicPr>
+          <p:nvPr/>
+        </p:nvPicPr>
+        <p:blipFill>
+          <a:blip r:embed="rId2"/>
+          <a:stretch>
+            <a:fillRect/>
+          </a:stretch>
+        </p:blipFill>
+        <p:spPr>
+          <a:xfrm>
+            <a:off x="8732520" y="2057400"/>
+            <a:ext cx="2880360" cy="2880360"/>
+          </a:xfrm>
+          <a:prstGeom prst="rect">
+            <a:avLst/>
+          </a:prstGeom>
+        </p:spPr>
+      </p:pic>
     </p:spTree>
   </p:cSld>
   <p:clrMapOvr>
@@ -4286,8 +4358,8 @@
         </p:nvSpPr>
         <p:spPr>
           <a:xfrm>
-            <a:off x="640080" y="685800"/>
-            <a:ext cx="10972800" cy="1463040"/>
+            <a:off x="640080" y="658368"/>
+            <a:ext cx="7863840" cy="1645920"/>
           </a:xfrm>
           <a:prstGeom prst="rect">
             <a:avLst/>
@@ -4301,7 +4373,7 @@
           <a:lstStyle/>
           <a:p>
             <a:r>
-              <a:rPr sz="3200" b="1">
+              <a:rPr sz="3000" b="1">
                 <a:solidFill>
                   <a:srgbClr val="FFFFFF"/>
                 </a:solidFill>
@@ -4320,8 +4392,8 @@
         </p:nvSpPr>
         <p:spPr>
           <a:xfrm>
-            <a:off x="777240" y="2286000"/>
-            <a:ext cx="10607040" cy="4754880"/>
+            <a:off x="777240" y="2331720"/>
+            <a:ext cx="7498079" cy="4754880"/>
           </a:xfrm>
           <a:prstGeom prst="rect">
             <a:avLst/>
@@ -4340,7 +4412,7 @@
               </a:spcAft>
             </a:pPr>
             <a:r>
-              <a:rPr sz="2400" b="0">
+              <a:rPr sz="2200" b="0">
                 <a:solidFill>
                   <a:srgbClr val="FFFFFF"/>
                 </a:solidFill>
@@ -4356,7 +4428,7 @@
               </a:spcAft>
             </a:pPr>
             <a:r>
-              <a:rPr sz="2400" b="0">
+              <a:rPr sz="2200" b="0">
                 <a:solidFill>
                   <a:srgbClr val="FFFFFF"/>
                 </a:solidFill>
@@ -4372,7 +4444,7 @@
               </a:spcAft>
             </a:pPr>
             <a:r>
-              <a:rPr sz="2400" b="0">
+              <a:rPr sz="2200" b="0">
                 <a:solidFill>
                   <a:srgbClr val="FFFFFF"/>
                 </a:solidFill>
@@ -4388,7 +4460,7 @@
               </a:spcAft>
             </a:pPr>
             <a:r>
-              <a:rPr sz="2400" b="0">
+              <a:rPr sz="2200" b="0">
                 <a:solidFill>
                   <a:srgbClr val="FFFFFF"/>
                 </a:solidFill>
@@ -4399,6 +4471,30 @@
           </a:p>
         </p:txBody>
       </p:sp>
+      <p:pic>
+        <p:nvPicPr>
+          <p:cNvPr id="6" name="Picture 5" descr="dw-script.jpg"/>
+          <p:cNvPicPr>
+            <a:picLocks noChangeAspect="1"/>
+          </p:cNvPicPr>
+          <p:nvPr/>
+        </p:nvPicPr>
+        <p:blipFill>
+          <a:blip r:embed="rId2"/>
+          <a:stretch>
+            <a:fillRect/>
+          </a:stretch>
+        </p:blipFill>
+        <p:spPr>
+          <a:xfrm>
+            <a:off x="8732520" y="2057400"/>
+            <a:ext cx="2880360" cy="2880360"/>
+          </a:xfrm>
+          <a:prstGeom prst="rect">
+            <a:avLst/>
+          </a:prstGeom>
+        </p:spPr>
+      </p:pic>
     </p:spTree>
   </p:cSld>
   <p:clrMapOvr>
@@ -4502,8 +4598,8 @@
         </p:nvSpPr>
         <p:spPr>
           <a:xfrm>
-            <a:off x="640080" y="685800"/>
-            <a:ext cx="10972800" cy="1463040"/>
+            <a:off x="640080" y="658368"/>
+            <a:ext cx="7863840" cy="1645920"/>
           </a:xfrm>
           <a:prstGeom prst="rect">
             <a:avLst/>
@@ -4517,7 +4613,7 @@
           <a:lstStyle/>
           <a:p>
             <a:r>
-              <a:rPr sz="3200" b="1">
+              <a:rPr sz="3000" b="1">
                 <a:solidFill>
                   <a:srgbClr val="FFFFFF"/>
                 </a:solidFill>
@@ -4536,8 +4632,8 @@
         </p:nvSpPr>
         <p:spPr>
           <a:xfrm>
-            <a:off x="777240" y="2286000"/>
-            <a:ext cx="10607040" cy="4754880"/>
+            <a:off x="777240" y="2331720"/>
+            <a:ext cx="7498079" cy="4754880"/>
           </a:xfrm>
           <a:prstGeom prst="rect">
             <a:avLst/>
@@ -4556,7 +4652,7 @@
               </a:spcAft>
             </a:pPr>
             <a:r>
-              <a:rPr sz="2400" b="0">
+              <a:rPr sz="2200" b="0">
                 <a:solidFill>
                   <a:srgbClr val="FFFFFF"/>
                 </a:solidFill>
@@ -4572,7 +4668,7 @@
               </a:spcAft>
             </a:pPr>
             <a:r>
-              <a:rPr sz="2400" b="0">
+              <a:rPr sz="2200" b="0">
                 <a:solidFill>
                   <a:srgbClr val="FFFFFF"/>
                 </a:solidFill>
@@ -4588,7 +4684,7 @@
               </a:spcAft>
             </a:pPr>
             <a:r>
-              <a:rPr sz="2400" b="0">
+              <a:rPr sz="2200" b="0">
                 <a:solidFill>
                   <a:srgbClr val="FFFFFF"/>
                 </a:solidFill>
@@ -4599,6 +4695,30 @@
           </a:p>
         </p:txBody>
       </p:sp>
+      <p:pic>
+        <p:nvPicPr>
+          <p:cNvPr id="6" name="Picture 5" descr="dw-interview.jpg"/>
+          <p:cNvPicPr>
+            <a:picLocks noChangeAspect="1"/>
+          </p:cNvPicPr>
+          <p:nvPr/>
+        </p:nvPicPr>
+        <p:blipFill>
+          <a:blip r:embed="rId2"/>
+          <a:stretch>
+            <a:fillRect/>
+          </a:stretch>
+        </p:blipFill>
+        <p:spPr>
+          <a:xfrm>
+            <a:off x="8732520" y="2057400"/>
+            <a:ext cx="2880360" cy="2880360"/>
+          </a:xfrm>
+          <a:prstGeom prst="rect">
+            <a:avLst/>
+          </a:prstGeom>
+        </p:spPr>
+      </p:pic>
     </p:spTree>
   </p:cSld>
   <p:clrMapOvr>
@@ -4702,8 +4822,8 @@
         </p:nvSpPr>
         <p:spPr>
           <a:xfrm>
-            <a:off x="640080" y="685800"/>
-            <a:ext cx="10972800" cy="1463040"/>
+            <a:off x="640080" y="658368"/>
+            <a:ext cx="10972800" cy="1645920"/>
           </a:xfrm>
           <a:prstGeom prst="rect">
             <a:avLst/>
@@ -4717,7 +4837,7 @@
           <a:lstStyle/>
           <a:p>
             <a:r>
-              <a:rPr sz="3200" b="1">
+              <a:rPr sz="3000" b="1">
                 <a:solidFill>
                   <a:srgbClr val="FFFFFF"/>
                 </a:solidFill>
@@ -4967,8 +5087,8 @@
         </p:nvSpPr>
         <p:spPr>
           <a:xfrm>
-            <a:off x="640080" y="685800"/>
-            <a:ext cx="10972800" cy="1463040"/>
+            <a:off x="640080" y="658368"/>
+            <a:ext cx="7863840" cy="1645920"/>
           </a:xfrm>
           <a:prstGeom prst="rect">
             <a:avLst/>
@@ -4982,7 +5102,7 @@
           <a:lstStyle/>
           <a:p>
             <a:r>
-              <a:rPr sz="3200" b="1">
+              <a:rPr sz="3000" b="1">
                 <a:solidFill>
                   <a:srgbClr val="FFFFFF"/>
                 </a:solidFill>
@@ -5001,8 +5121,8 @@
         </p:nvSpPr>
         <p:spPr>
           <a:xfrm>
-            <a:off x="777240" y="2286000"/>
-            <a:ext cx="10607040" cy="4754880"/>
+            <a:off x="777240" y="2331720"/>
+            <a:ext cx="7498079" cy="4754880"/>
           </a:xfrm>
           <a:prstGeom prst="rect">
             <a:avLst/>
@@ -5021,7 +5141,7 @@
               </a:spcAft>
             </a:pPr>
             <a:r>
-              <a:rPr sz="2400" b="0">
+              <a:rPr sz="2200" b="0">
                 <a:solidFill>
                   <a:srgbClr val="FFFFFF"/>
                 </a:solidFill>
@@ -5037,7 +5157,7 @@
               </a:spcAft>
             </a:pPr>
             <a:r>
-              <a:rPr sz="2400" b="0">
+              <a:rPr sz="2200" b="0">
                 <a:solidFill>
                   <a:srgbClr val="FFFFFF"/>
                 </a:solidFill>
@@ -5053,7 +5173,7 @@
               </a:spcAft>
             </a:pPr>
             <a:r>
-              <a:rPr sz="2400" b="0">
+              <a:rPr sz="2200" b="0">
                 <a:solidFill>
                   <a:srgbClr val="FFFFFF"/>
                 </a:solidFill>
@@ -5069,7 +5189,7 @@
               </a:spcAft>
             </a:pPr>
             <a:r>
-              <a:rPr sz="2400" b="0">
+              <a:rPr sz="2200" b="0">
                 <a:solidFill>
                   <a:srgbClr val="FFFFFF"/>
                 </a:solidFill>
@@ -5080,6 +5200,30 @@
           </a:p>
         </p:txBody>
       </p:sp>
+      <p:pic>
+        <p:nvPicPr>
+          <p:cNvPr id="6" name="Picture 5" descr="dw-loop.jpg"/>
+          <p:cNvPicPr>
+            <a:picLocks noChangeAspect="1"/>
+          </p:cNvPicPr>
+          <p:nvPr/>
+        </p:nvPicPr>
+        <p:blipFill>
+          <a:blip r:embed="rId2"/>
+          <a:stretch>
+            <a:fillRect/>
+          </a:stretch>
+        </p:blipFill>
+        <p:spPr>
+          <a:xfrm>
+            <a:off x="8549640" y="1965960"/>
+            <a:ext cx="3108960" cy="3108960"/>
+          </a:xfrm>
+          <a:prstGeom prst="rect">
+            <a:avLst/>
+          </a:prstGeom>
+        </p:spPr>
+      </p:pic>
     </p:spTree>
   </p:cSld>
   <p:clrMapOvr>
